--- a/proposta-modular-estruturas.pptx
+++ b/proposta-modular-estruturas.pptx
@@ -5872,7 +5872,7 @@
                 </a:solidFill>
                 <a:latin typeface="Arial"/>
               </a:rPr>
-              <a:t>•  Account Manager orquestrando a operação</a:t>
+              <a:t>•  Account Manager (não dedicado) orquestrando a operação</a:t>
             </a:r>
           </a:p>
           <a:p>
@@ -9856,7 +9856,7 @@
                 </a:solidFill>
                 <a:latin typeface="Arial"/>
               </a:rPr>
-              <a:t>•  Account Manager + Gestão de Tráfego</a:t>
+              <a:t>•  Account Manager (não dedicado) + GT</a:t>
             </a:r>
           </a:p>
           <a:p>
